--- a/Lesson04-Calculator/Lesson04-Calculator.pptx
+++ b/Lesson04-Calculator/Lesson04-Calculator.pptx
@@ -775,7 +775,7 @@
           <a:p>
             <a:r>
               <a:rPr lang="en-US" dirty="0"/>
-              <a:t>Setup follows the earlier lessons: the .NET 10 SDK, a console project called Calculator, and the Microsoft.SemanticKernel and Connectors.OpenAI packages at version 1.78.0. The key comes from OPENAI_API_KEY and the model is gpt-4.1-mini. This is the first lesson with two source files. Program.cs builds the kernel and runs the prompt, and MathPlugIn.cs holds the MathPlugin class, following the series rule of one class per file. Note the file name is spelled MathPlugIn with a capital I, while the class itself is MathPlugin.</a:t>
+              <a:t>Setup follows the earlier lessons: the .NET 10 SDK, a console project called Calculator, and the Microsoft.SemanticKernel and Connectors.OpenAI packages at version 1.78.0. The key comes from OPENAI_API_KEY and the model is gpt-4.1-mini. This is the first lesson with two source files. Program.cs builds the kernel and runs the prompt, and MathPlugin.cs holds the MathPlugin class, following the series rule of one class per file, with the file named after the class.</a:t>
             </a:r>
             <a:endParaRPr lang="en-US" dirty="0"/>
           </a:p>
@@ -1127,7 +1127,7 @@
           <a:p>
             <a:r>
               <a:rPr lang="en-US" dirty="0"/>
-              <a:t>Adding the plugin to the kernel only makes it available. The model gets permission to use it through the execution settings: we create OpenAIPromptExecutionSettings with ToolCallBehavior set to AutoInvokeKernelFunctions, and pass those settings into KernelArguments, exactly the way Lesson 3 passed Temperature and TopP. With that setting, Semantic Kernel offers the kernel's functions to the model as tools and automatically runs any call the model requests. Without it, the plugin sits unused and the model would just try to do the arithmetic itself.</a:t>
+              <a:t>Adding the plugin to the kernel only makes it available to Semantic Kernel. Whether the model ever hears about it is decided by the execution settings: we create OpenAIPromptExecutionSettings with ToolCallBehavior set to AutoInvokeKernelFunctions, and pass those settings into KernelArguments, exactly the way Lesson 3 passed Temperature and TopP. With that setting, Semantic Kernel sends the kernel's functions to the model as tools and automatically runs any call the model requests. Without it, the functions are never advertised at all, so the model doesn't know the tools exist and just tries to do the arithmetic itself.</a:t>
             </a:r>
             <a:endParaRPr lang="en-US" dirty="0"/>
           </a:p>
@@ -1215,7 +1215,7 @@
           <a:p>
             <a:r>
               <a:rPr lang="en-US" dirty="0"/>
-              <a:t>Set OPENAI_API_KEY and run the project. The program prints the question, then Thinking and invoking C# tools. Next come the NATIVE CODE EXECUTION lines, printed by our plugin methods as the model calls them: 124 minus 15 is 109, times 3 is 327, divided by 4 people is 81.75. The exact sequence on this slide is illustrative. The model decides which calls to make, so it might first call Add to work out that myself and 3 friends is 4 people, and its final wording will vary. What shouldn't vary is the arithmetic, because every number came from C#. Note that unlike Lessons 2 and 3, this program has no try/catch around the call, so an API failure surfaces as an exception.</a:t>
+              <a:t>Set OPENAI_API_KEY and run the project. The program prints the question, then Thinking and invoking C# tools. Next come the NATIVE CODE EXECUTION lines, printed by our plugin methods as the model calls them: 124 minus 15 is 109, times 3 is 327, divided by 4 people is 81.75. The exact sequence on this slide is illustrative. The model decides which calls to make, so it might first call Add to work out that myself and 3 friends is 4 people, and its final wording will vary. What shouldn't vary is the arithmetic, because every number came from C#. Like Lesson 3, the call is wrapped in a try/catch, so an API failure prints Calculation failed with a readable message instead of a stack trace.</a:t>
             </a:r>
             <a:endParaRPr lang="en-US" dirty="0"/>
           </a:p>
@@ -4973,7 +4973,7 @@
                 <a:ea typeface="Calibri" pitchFamily="34" charset="-122"/>
                 <a:cs typeface="Calibri" pitchFamily="34" charset="-120"/>
               </a:rPr>
-              <a:t>Program.cs wires the kernel; MathPlugIn.cs holds the MathPlugin class. The model is gpt-4.1-mini.</a:t>
+              <a:t>Program.cs wires the kernel; MathPlugin.cs holds the MathPlugin class. The model is gpt-4.1-mini.</a:t>
             </a:r>
             <a:endParaRPr lang="en-US" sz="1200" dirty="0"/>
           </a:p>
@@ -8020,7 +8020,7 @@
                 <a:ea typeface="Calibri" pitchFamily="34" charset="-122"/>
                 <a:cs typeface="Calibri" pitchFamily="34" charset="-120"/>
               </a:rPr>
-              <a:t>PERMISSION</a:t>
+              <a:t>EXECUTION SETTINGS</a:t>
             </a:r>
             <a:endParaRPr lang="en-US" sz="1100" dirty="0"/>
           </a:p>
@@ -8259,7 +8259,7 @@
                 <a:ea typeface="Calibri" pitchFamily="34" charset="-122"/>
                 <a:cs typeface="Calibri" pitchFamily="34" charset="-120"/>
               </a:rPr>
-              <a:t>The model never calls it</a:t>
+              <a:t>The model never sees the tools</a:t>
             </a:r>
             <a:endParaRPr lang="en-US" sz="1300" dirty="0"/>
           </a:p>
@@ -9662,7 +9662,7 @@
                 <a:ea typeface="Courier New" pitchFamily="34" charset="-122"/>
                 <a:cs typeface="Courier New" pitchFamily="34" charset="-120"/>
               </a:rPr>
-              <a:t>Calculator/MathPlugIn.cs</a:t>
+              <a:t>Calculator/MathPlugin.cs</a:t>
             </a:r>
             <a:endParaRPr lang="en-US" sz="850" dirty="0"/>
           </a:p>
